--- a/public/fun/cards/care/care-13.pptx
+++ b/public/fun/cards/care/care-13.pptx
@@ -3085,7 +3085,7 @@
     <p:bg>
       <p:bgPr>
         <a:solidFill>
-          <a:srgbClr val="FBF8F2"/>
+          <a:srgbClr val="EAF5FF"/>
         </a:solidFill>
         <a:effectLst/>
       </p:bgPr>
@@ -3099,93 +3099,14 @@
       <p:grpSpPr/>
       <p:sp>
         <p:nvSpPr>
-          <p:cNvPr id="2" name="Rectangle 1"/>
-          <p:cNvSpPr/>
+          <p:cNvPr id="2" name="텍스트"/>
+          <p:cNvSpPr txBox="1"/>
           <p:nvPr/>
         </p:nvSpPr>
         <p:spPr>
           <a:xfrm>
-            <a:off x="0" y="0"/>
-            <a:ext cx="3240000" cy="720000"/>
-          </a:xfrm>
-          <a:prstGeom prst="rect">
-            <a:avLst/>
-          </a:prstGeom>
-          <a:solidFill>
-            <a:srgbClr val="3B9151"/>
-          </a:solidFill>
-          <a:ln>
-            <a:noFill/>
-          </a:ln>
-        </p:spPr>
-        <p:txBody>
-          <a:bodyPr rtlCol="0" anchor="ctr"/>
-          <a:lstStyle/>
-          <a:p>
-            <a:pPr algn="ctr"/>
-          </a:p>
-        </p:txBody>
-      </p:sp>
-      <p:sp>
-        <p:nvSpPr>
-          <p:cNvPr id="3" name="Oval 2"/>
-          <p:cNvSpPr/>
-          <p:nvPr/>
-        </p:nvSpPr>
-        <p:spPr>
-          <a:xfrm rot="2280000">
-            <a:off x="2767968" y="214848"/>
-            <a:ext cx="152064" cy="290304"/>
-          </a:xfrm>
-          <a:prstGeom prst="ellipse">
-            <a:avLst/>
-          </a:prstGeom>
-          <a:solidFill>
-            <a:srgbClr val="FFFFFF"/>
-          </a:solidFill>
-          <a:ln>
-            <a:noFill/>
-          </a:ln>
-        </p:spPr>
-        <p:txBody>
-          <a:bodyPr rtlCol="0" anchor="ctr"/>
-          <a:lstStyle/>
-          <a:p>
-            <a:pPr algn="ctr"/>
-          </a:p>
-        </p:txBody>
-      </p:sp>
-      <p:cxnSp>
-        <p:nvCxnSpPr>
-          <p:cNvPr id="4" name="Connector 3"/>
-          <p:cNvCxnSpPr/>
-          <p:nvPr/>
-        </p:nvCxnSpPr>
-        <p:spPr>
-          <a:xfrm flipV="1">
-            <a:off x="2754144" y="256320"/>
-            <a:ext cx="172800" cy="207360"/>
-          </a:xfrm>
-          <a:prstGeom prst="line">
-            <a:avLst/>
-          </a:prstGeom>
-          <a:ln w="13824">
-            <a:solidFill>
-              <a:srgbClr val="737373"/>
-            </a:solidFill>
-          </a:ln>
-        </p:spPr>
-      </p:cxnSp>
-      <p:sp>
-        <p:nvSpPr>
-          <p:cNvPr id="5" name="텍스트"/>
-          <p:cNvSpPr txBox="1"/>
-          <p:nvPr/>
-        </p:nvSpPr>
-        <p:spPr>
-          <a:xfrm>
-            <a:off x="230400" y="187200"/>
-            <a:ext cx="2160000" cy="305437"/>
+            <a:off x="252000" y="223200"/>
+            <a:ext cx="2016000" cy="133351"/>
           </a:xfrm>
           <a:prstGeom prst="rect">
             <a:avLst/>
@@ -3200,32 +3121,61 @@
           <a:p>
             <a:pPr algn="l">
               <a:lnSpc>
-                <a:spcPts val="2682"/>
+                <a:spcPts val="1015"/>
               </a:lnSpc>
             </a:pPr>
             <a:r>
-              <a:rPr sz="1850" b="1" spc="50">
+              <a:rPr sz="700" b="1" spc="200">
                 <a:solidFill>
-                  <a:srgbClr val="FFFFFF"/>
+                  <a:srgbClr val="1D4872"/>
                 </a:solidFill>
                 <a:latin typeface="맑은 고딕"/>
                 <a:ea typeface="맑은 고딕"/>
               </a:rPr>
-              <a:t>서나연</a:t>
-            </a:r>
-          </a:p>
-        </p:txBody>
-      </p:sp>
-      <p:sp>
-        <p:nvSpPr>
-          <p:cNvPr id="6" name="텍스트"/>
+              <a:t>의원 · 약국 이름</a:t>
+            </a:r>
+          </a:p>
+        </p:txBody>
+      </p:sp>
+      <p:sp>
+        <p:nvSpPr>
+          <p:cNvPr id="3" name="Oval 2"/>
+          <p:cNvSpPr/>
+          <p:nvPr/>
+        </p:nvSpPr>
+        <p:spPr>
+          <a:xfrm>
+            <a:off x="2955600" y="241200"/>
+            <a:ext cx="64800" cy="64800"/>
+          </a:xfrm>
+          <a:prstGeom prst="ellipse">
+            <a:avLst/>
+          </a:prstGeom>
+          <a:solidFill>
+            <a:srgbClr val="2E9BFF"/>
+          </a:solidFill>
+          <a:ln>
+            <a:noFill/>
+          </a:ln>
+        </p:spPr>
+        <p:txBody>
+          <a:bodyPr rtlCol="0" anchor="ctr"/>
+          <a:lstStyle/>
+          <a:p>
+            <a:pPr algn="ctr"/>
+          </a:p>
+        </p:txBody>
+      </p:sp>
+      <p:sp>
+        <p:nvSpPr>
+          <p:cNvPr id="4" name="텍스트"/>
           <p:cNvSpPr txBox="1"/>
           <p:nvPr/>
         </p:nvSpPr>
         <p:spPr>
           <a:xfrm>
-            <a:off x="230400" y="475200"/>
-            <a:ext cx="2160000" cy="122400"/>
+            <a:off x="252000" y="676800"/>
+            <a:ext cx="2520000" cy="360000"/>
           </a:xfrm>
           <a:prstGeom prst="rect">
             <a:avLst/>
@@ -3240,32 +3190,32 @@
           <a:p>
             <a:pPr algn="l">
               <a:lnSpc>
-                <a:spcPts val="1232"/>
+                <a:spcPts val="3190"/>
               </a:lnSpc>
             </a:pPr>
             <a:r>
-              <a:rPr sz="850" b="1">
+              <a:rPr sz="2200" b="1">
                 <a:solidFill>
-                  <a:srgbClr val="FFFFFF"/>
+                  <a:srgbClr val="12151C"/>
                 </a:solidFill>
                 <a:latin typeface="맑은 고딕"/>
                 <a:ea typeface="맑은 고딕"/>
               </a:rPr>
-              <a:t>간호사</a:t>
-            </a:r>
-          </a:p>
-        </p:txBody>
-      </p:sp>
-      <p:sp>
-        <p:nvSpPr>
-          <p:cNvPr id="7" name="텍스트"/>
+              <a:t>서나연</a:t>
+            </a:r>
+          </a:p>
+        </p:txBody>
+      </p:sp>
+      <p:sp>
+        <p:nvSpPr>
+          <p:cNvPr id="5" name="텍스트"/>
           <p:cNvSpPr txBox="1"/>
           <p:nvPr/>
         </p:nvSpPr>
         <p:spPr>
           <a:xfrm>
-            <a:off x="230400" y="835200"/>
-            <a:ext cx="1800000" cy="100800"/>
+            <a:off x="252000" y="1080000"/>
+            <a:ext cx="2520000" cy="171451"/>
           </a:xfrm>
           <a:prstGeom prst="rect">
             <a:avLst/>
@@ -3280,32 +3230,53 @@
           <a:p>
             <a:pPr algn="l">
               <a:lnSpc>
-                <a:spcPts val="1087"/>
+                <a:spcPts val="1305"/>
               </a:lnSpc>
             </a:pPr>
             <a:r>
-              <a:rPr sz="750" b="1" spc="150">
+              <a:rPr sz="900" b="0">
                 <a:solidFill>
-                  <a:srgbClr val="995E6A"/>
+                  <a:srgbClr val="1D4872"/>
                 </a:solidFill>
                 <a:latin typeface="맑은 고딕"/>
                 <a:ea typeface="맑은 고딕"/>
               </a:rPr>
-              <a:t>의원 · 약국 이름</a:t>
-            </a:r>
-          </a:p>
-        </p:txBody>
-      </p:sp>
-      <p:sp>
-        <p:nvSpPr>
-          <p:cNvPr id="8" name="텍스트"/>
+              <a:t>간호사</a:t>
+            </a:r>
+          </a:p>
+        </p:txBody>
+      </p:sp>
+      <p:cxnSp>
+        <p:nvCxnSpPr>
+          <p:cNvPr id="6" name="Connector 5"/>
+          <p:cNvCxnSpPr/>
+          <p:nvPr/>
+        </p:nvCxnSpPr>
+        <p:spPr>
+          <a:xfrm>
+            <a:off x="252000" y="1339200"/>
+            <a:ext cx="2736000" cy="0"/>
+          </a:xfrm>
+          <a:prstGeom prst="line">
+            <a:avLst/>
+          </a:prstGeom>
+          <a:ln w="5760">
+            <a:solidFill>
+              <a:srgbClr val="C4E3FF"/>
+            </a:solidFill>
+          </a:ln>
+        </p:spPr>
+      </p:cxnSp>
+      <p:sp>
+        <p:nvSpPr>
+          <p:cNvPr id="7" name="텍스트"/>
           <p:cNvSpPr txBox="1"/>
           <p:nvPr/>
         </p:nvSpPr>
         <p:spPr>
           <a:xfrm>
-            <a:off x="230400" y="1015200"/>
-            <a:ext cx="122400" cy="168911"/>
+            <a:off x="252000" y="1411200"/>
+            <a:ext cx="792000" cy="129541"/>
           </a:xfrm>
           <a:prstGeom prst="rect">
             <a:avLst/>
@@ -3320,32 +3291,32 @@
           <a:p>
             <a:pPr algn="l">
               <a:lnSpc>
-                <a:spcPts val="1015"/>
+                <a:spcPts val="986"/>
               </a:lnSpc>
             </a:pPr>
             <a:r>
-              <a:rPr sz="700" b="1">
+              <a:rPr sz="680" b="0">
                 <a:solidFill>
-                  <a:srgbClr val="327B45"/>
+                  <a:srgbClr val="12151C"/>
                 </a:solidFill>
                 <a:latin typeface="맑은 고딕"/>
                 <a:ea typeface="맑은 고딕"/>
               </a:rPr>
-              <a:t>T</a:t>
-            </a:r>
-          </a:p>
-        </p:txBody>
-      </p:sp>
-      <p:sp>
-        <p:nvSpPr>
-          <p:cNvPr id="9" name="텍스트"/>
+              <a:t>010-1234-5678</a:t>
+            </a:r>
+          </a:p>
+        </p:txBody>
+      </p:sp>
+      <p:sp>
+        <p:nvSpPr>
+          <p:cNvPr id="8" name="텍스트"/>
           <p:cNvSpPr txBox="1"/>
           <p:nvPr/>
         </p:nvSpPr>
         <p:spPr>
           <a:xfrm>
-            <a:off x="374400" y="1015200"/>
-            <a:ext cx="1872000" cy="168911"/>
+            <a:off x="1080000" y="1411200"/>
+            <a:ext cx="900000" cy="129541"/>
           </a:xfrm>
           <a:prstGeom prst="rect">
             <a:avLst/>
@@ -3360,32 +3331,32 @@
           <a:p>
             <a:pPr algn="l">
               <a:lnSpc>
-                <a:spcPts val="1015"/>
+                <a:spcPts val="986"/>
               </a:lnSpc>
             </a:pPr>
             <a:r>
-              <a:rPr sz="700" b="0">
+              <a:rPr sz="680" b="0">
                 <a:solidFill>
-                  <a:srgbClr val="9E2E4A"/>
+                  <a:srgbClr val="12151C"/>
                 </a:solidFill>
                 <a:latin typeface="맑은 고딕"/>
                 <a:ea typeface="맑은 고딕"/>
               </a:rPr>
-              <a:t>010-1234-5678</a:t>
-            </a:r>
-          </a:p>
-        </p:txBody>
-      </p:sp>
-      <p:sp>
-        <p:nvSpPr>
-          <p:cNvPr id="10" name="텍스트"/>
+              <a:t>name@example.com</a:t>
+            </a:r>
+          </a:p>
+        </p:txBody>
+      </p:sp>
+      <p:sp>
+        <p:nvSpPr>
+          <p:cNvPr id="9" name="텍스트"/>
           <p:cNvSpPr txBox="1"/>
           <p:nvPr/>
         </p:nvSpPr>
         <p:spPr>
           <a:xfrm>
-            <a:off x="230400" y="1184111"/>
-            <a:ext cx="122400" cy="168911"/>
+            <a:off x="2052000" y="1411200"/>
+            <a:ext cx="972000" cy="129541"/>
           </a:xfrm>
           <a:prstGeom prst="rect">
             <a:avLst/>
@@ -3400,32 +3371,32 @@
           <a:p>
             <a:pPr algn="l">
               <a:lnSpc>
-                <a:spcPts val="1015"/>
+                <a:spcPts val="986"/>
               </a:lnSpc>
             </a:pPr>
             <a:r>
-              <a:rPr sz="700" b="1">
+              <a:rPr sz="680" b="0">
                 <a:solidFill>
-                  <a:srgbClr val="327B45"/>
+                  <a:srgbClr val="12151C"/>
                 </a:solidFill>
                 <a:latin typeface="맑은 고딕"/>
                 <a:ea typeface="맑은 고딕"/>
               </a:rPr>
-              <a:t>E</a:t>
-            </a:r>
-          </a:p>
-        </p:txBody>
-      </p:sp>
-      <p:sp>
-        <p:nvSpPr>
-          <p:cNvPr id="11" name="텍스트"/>
+              <a:t>주소를 입력해 주세요</a:t>
+            </a:r>
+          </a:p>
+        </p:txBody>
+      </p:sp>
+      <p:sp>
+        <p:nvSpPr>
+          <p:cNvPr id="10" name="텍스트"/>
           <p:cNvSpPr txBox="1"/>
           <p:nvPr/>
         </p:nvSpPr>
         <p:spPr>
           <a:xfrm>
-            <a:off x="374400" y="1184111"/>
-            <a:ext cx="1872000" cy="168911"/>
+            <a:off x="252000" y="1526400"/>
+            <a:ext cx="216000" cy="95251"/>
           </a:xfrm>
           <a:prstGeom prst="rect">
             <a:avLst/>
@@ -3440,32 +3411,32 @@
           <a:p>
             <a:pPr algn="l">
               <a:lnSpc>
-                <a:spcPts val="1015"/>
+                <a:spcPts val="725"/>
               </a:lnSpc>
             </a:pPr>
             <a:r>
-              <a:rPr sz="700" b="0">
+              <a:rPr sz="500" b="1" spc="120">
                 <a:solidFill>
-                  <a:srgbClr val="9E2E4A"/>
+                  <a:srgbClr val="1D4872"/>
                 </a:solidFill>
                 <a:latin typeface="맑은 고딕"/>
                 <a:ea typeface="맑은 고딕"/>
               </a:rPr>
-              <a:t>name@example.com</a:t>
-            </a:r>
-          </a:p>
-        </p:txBody>
-      </p:sp>
-      <p:sp>
-        <p:nvSpPr>
-          <p:cNvPr id="12" name="텍스트"/>
+              <a:t>TEL</a:t>
+            </a:r>
+          </a:p>
+        </p:txBody>
+      </p:sp>
+      <p:sp>
+        <p:nvSpPr>
+          <p:cNvPr id="11" name="텍스트"/>
           <p:cNvSpPr txBox="1"/>
           <p:nvPr/>
         </p:nvSpPr>
         <p:spPr>
           <a:xfrm>
-            <a:off x="230400" y="1353022"/>
-            <a:ext cx="122400" cy="168911"/>
+            <a:off x="1080000" y="1526400"/>
+            <a:ext cx="216000" cy="95251"/>
           </a:xfrm>
           <a:prstGeom prst="rect">
             <a:avLst/>
@@ -3480,32 +3451,32 @@
           <a:p>
             <a:pPr algn="l">
               <a:lnSpc>
-                <a:spcPts val="1015"/>
+                <a:spcPts val="725"/>
               </a:lnSpc>
             </a:pPr>
             <a:r>
-              <a:rPr sz="700" b="1">
+              <a:rPr sz="500" b="1" spc="120">
                 <a:solidFill>
-                  <a:srgbClr val="327B45"/>
+                  <a:srgbClr val="1D4872"/>
                 </a:solidFill>
                 <a:latin typeface="맑은 고딕"/>
                 <a:ea typeface="맑은 고딕"/>
               </a:rPr>
-              <a:t>A</a:t>
-            </a:r>
-          </a:p>
-        </p:txBody>
-      </p:sp>
-      <p:sp>
-        <p:nvSpPr>
-          <p:cNvPr id="13" name="텍스트"/>
+              <a:t>MAIL</a:t>
+            </a:r>
+          </a:p>
+        </p:txBody>
+      </p:sp>
+      <p:sp>
+        <p:nvSpPr>
+          <p:cNvPr id="12" name="텍스트"/>
           <p:cNvSpPr txBox="1"/>
           <p:nvPr/>
         </p:nvSpPr>
         <p:spPr>
           <a:xfrm>
-            <a:off x="374400" y="1353022"/>
-            <a:ext cx="1872000" cy="168911"/>
+            <a:off x="2052000" y="1526400"/>
+            <a:ext cx="216000" cy="95251"/>
           </a:xfrm>
           <a:prstGeom prst="rect">
             <a:avLst/>
@@ -3520,18 +3491,18 @@
           <a:p>
             <a:pPr algn="l">
               <a:lnSpc>
-                <a:spcPts val="1015"/>
+                <a:spcPts val="725"/>
               </a:lnSpc>
             </a:pPr>
             <a:r>
-              <a:rPr sz="700" b="0">
+              <a:rPr sz="500" b="1" spc="120">
                 <a:solidFill>
-                  <a:srgbClr val="9E2E4A"/>
+                  <a:srgbClr val="1D4872"/>
                 </a:solidFill>
                 <a:latin typeface="맑은 고딕"/>
                 <a:ea typeface="맑은 고딕"/>
               </a:rPr>
-              <a:t>주소를 입력해 주세요</a:t>
+              <a:t>ADDR</a:t>
             </a:r>
           </a:p>
         </p:txBody>
@@ -3550,7 +3521,7 @@
     <p:bg>
       <p:bgPr>
         <a:solidFill>
-          <a:srgbClr val="9E2E4A"/>
+          <a:srgbClr val="2E9BFF"/>
         </a:solidFill>
         <a:effectLst/>
       </p:bgPr>
@@ -3564,43 +3535,14 @@
       <p:grpSpPr/>
       <p:sp>
         <p:nvSpPr>
-          <p:cNvPr id="2" name="Rectangle 1"/>
-          <p:cNvSpPr/>
+          <p:cNvPr id="2" name="텍스트"/>
+          <p:cNvSpPr txBox="1"/>
           <p:nvPr/>
         </p:nvSpPr>
         <p:spPr>
           <a:xfrm>
-            <a:off x="0" y="0"/>
-            <a:ext cx="64800" cy="1800000"/>
-          </a:xfrm>
-          <a:prstGeom prst="rect">
-            <a:avLst/>
-          </a:prstGeom>
-          <a:solidFill>
-            <a:srgbClr val="DE8DA1"/>
-          </a:solidFill>
-          <a:ln>
-            <a:noFill/>
-          </a:ln>
-        </p:spPr>
-        <p:txBody>
-          <a:bodyPr rtlCol="0" anchor="ctr"/>
-          <a:lstStyle/>
-          <a:p>
-            <a:pPr algn="ctr"/>
-          </a:p>
-        </p:txBody>
-      </p:sp>
-      <p:sp>
-        <p:nvSpPr>
-          <p:cNvPr id="3" name="텍스트"/>
-          <p:cNvSpPr txBox="1"/>
-          <p:nvPr/>
-        </p:nvSpPr>
-        <p:spPr>
-          <a:xfrm>
-            <a:off x="252000" y="432000"/>
-            <a:ext cx="2016000" cy="252000"/>
+            <a:off x="216000" y="72000"/>
+            <a:ext cx="1080000" cy="936000"/>
           </a:xfrm>
           <a:prstGeom prst="rect">
             <a:avLst/>
@@ -3615,32 +3557,32 @@
           <a:p>
             <a:pPr algn="l">
               <a:lnSpc>
-                <a:spcPts val="2465"/>
+                <a:spcPts val="15950"/>
               </a:lnSpc>
             </a:pPr>
             <a:r>
-              <a:rPr sz="1700" b="1">
+              <a:rPr sz="11000" b="1">
                 <a:solidFill>
-                  <a:srgbClr val="FFFFFF"/>
+                  <a:srgbClr val="12151C"/>
                 </a:solidFill>
                 <a:latin typeface="맑은 고딕"/>
                 <a:ea typeface="맑은 고딕"/>
               </a:rPr>
-              <a:t>의원 · 약국 이름</a:t>
-            </a:r>
-          </a:p>
-        </p:txBody>
-      </p:sp>
-      <p:sp>
-        <p:nvSpPr>
-          <p:cNvPr id="4" name="텍스트"/>
+              <a:t>“</a:t>
+            </a:r>
+          </a:p>
+        </p:txBody>
+      </p:sp>
+      <p:sp>
+        <p:nvSpPr>
+          <p:cNvPr id="3" name="텍스트"/>
           <p:cNvSpPr txBox="1"/>
           <p:nvPr/>
         </p:nvSpPr>
         <p:spPr>
           <a:xfrm>
-            <a:off x="252000" y="878400"/>
-            <a:ext cx="2016000" cy="540000"/>
+            <a:off x="252000" y="792000"/>
+            <a:ext cx="2520000" cy="648000"/>
           </a:xfrm>
           <a:prstGeom prst="rect">
             <a:avLst/>
@@ -3655,13 +3597,13 @@
           <a:p>
             <a:pPr algn="l">
               <a:lnSpc>
-                <a:spcPts val="1232"/>
+                <a:spcPts val="1812"/>
               </a:lnSpc>
             </a:pPr>
             <a:r>
-              <a:rPr sz="850" b="0">
+              <a:rPr sz="1250" b="1">
                 <a:solidFill>
-                  <a:srgbClr val="E6C8D0"/>
+                  <a:srgbClr val="12151C"/>
                 </a:solidFill>
                 <a:latin typeface="맑은 고딕"/>
                 <a:ea typeface="맑은 고딕"/>
@@ -3671,46 +3613,37 @@
           </a:p>
         </p:txBody>
       </p:sp>
-      <p:sp>
-        <p:nvSpPr>
-          <p:cNvPr id="5" name="Rectangle 4"/>
-          <p:cNvSpPr/>
+      <p:cxnSp>
+        <p:nvCxnSpPr>
+          <p:cNvPr id="4" name="Connector 3"/>
+          <p:cNvCxnSpPr/>
           <p:nvPr/>
-        </p:nvSpPr>
+        </p:nvCxnSpPr>
         <p:spPr>
           <a:xfrm>
-            <a:off x="2520000" y="1080000"/>
-            <a:ext cx="504000" cy="504000"/>
+            <a:off x="252000" y="1512000"/>
+            <a:ext cx="2736000" cy="0"/>
           </a:xfrm>
-          <a:prstGeom prst="rect">
+          <a:prstGeom prst="line">
             <a:avLst/>
           </a:prstGeom>
-          <a:noFill/>
-          <a:ln w="9000">
+          <a:ln w="5760">
             <a:solidFill>
-              <a:srgbClr val="DE8DA1"/>
+              <a:srgbClr val="2365A4"/>
             </a:solidFill>
-            <a:prstDash val="dash"/>
           </a:ln>
         </p:spPr>
-        <p:txBody>
-          <a:bodyPr rtlCol="0" anchor="ctr"/>
-          <a:lstStyle/>
-          <a:p>
-            <a:pPr algn="ctr"/>
-          </a:p>
-        </p:txBody>
-      </p:sp>
-      <p:sp>
-        <p:nvSpPr>
-          <p:cNvPr id="6" name="텍스트"/>
+      </p:cxnSp>
+      <p:sp>
+        <p:nvSpPr>
+          <p:cNvPr id="5" name="텍스트"/>
           <p:cNvSpPr txBox="1"/>
           <p:nvPr/>
         </p:nvSpPr>
         <p:spPr>
           <a:xfrm>
-            <a:off x="2520000" y="1080000"/>
-            <a:ext cx="504000" cy="504000"/>
+            <a:off x="252000" y="1569600"/>
+            <a:ext cx="2736000" cy="123826"/>
           </a:xfrm>
           <a:prstGeom prst="rect">
             <a:avLst/>
@@ -3718,108 +3651,29 @@
           <a:noFill/>
         </p:spPr>
         <p:txBody>
-          <a:bodyPr wrap="square" lIns="0" rIns="0" tIns="0" bIns="0" anchor="ctr">
+          <a:bodyPr wrap="square" lIns="0" rIns="0" tIns="0" bIns="0" anchor="t">
             <a:spAutoFit/>
           </a:bodyPr>
           <a:lstStyle/>
           <a:p>
-            <a:pPr algn="ctr">
+            <a:pPr algn="r">
               <a:lnSpc>
-                <a:spcPts val="1305"/>
+                <a:spcPts val="942"/>
               </a:lnSpc>
             </a:pPr>
             <a:r>
-              <a:rPr sz="900" b="1">
+              <a:rPr sz="650" b="1" spc="200">
                 <a:solidFill>
-                  <a:srgbClr val="E6C8D0"/>
+                  <a:srgbClr val="18324E"/>
                 </a:solidFill>
                 <a:latin typeface="맑은 고딕"/>
                 <a:ea typeface="맑은 고딕"/>
               </a:rPr>
-              <a:t>QR</a:t>
-            </a:r>
-          </a:p>
-        </p:txBody>
-      </p:sp>
-      <p:sp>
-        <p:nvSpPr>
-          <p:cNvPr id="7" name="Rectangle 6"/>
-          <p:cNvSpPr/>
-          <p:nvPr/>
-        </p:nvSpPr>
-        <p:spPr>
-          <a:xfrm>
-            <a:off x="252000" y="763200"/>
-            <a:ext cx="201600" cy="14400"/>
-          </a:xfrm>
-          <a:prstGeom prst="rect">
-            <a:avLst/>
-          </a:prstGeom>
-          <a:solidFill>
-            <a:srgbClr val="DE8DA1"/>
-          </a:solidFill>
-          <a:ln>
-            <a:noFill/>
-          </a:ln>
-        </p:spPr>
-        <p:txBody>
-          <a:bodyPr rtlCol="0" anchor="ctr"/>
-          <a:lstStyle/>
-          <a:p>
-            <a:pPr algn="ctr"/>
-          </a:p>
-        </p:txBody>
-      </p:sp>
-      <p:sp>
-        <p:nvSpPr>
-          <p:cNvPr id="8" name="Oval 7"/>
-          <p:cNvSpPr/>
-          <p:nvPr/>
-        </p:nvSpPr>
-        <p:spPr>
-          <a:xfrm rot="2280000">
-            <a:off x="2700720" y="295920"/>
-            <a:ext cx="142560" cy="272160"/>
-          </a:xfrm>
-          <a:prstGeom prst="ellipse">
-            <a:avLst/>
-          </a:prstGeom>
-          <a:solidFill>
-            <a:srgbClr val="DE8DA1"/>
-          </a:solidFill>
-          <a:ln>
-            <a:noFill/>
-          </a:ln>
-        </p:spPr>
-        <p:txBody>
-          <a:bodyPr rtlCol="0" anchor="ctr"/>
-          <a:lstStyle/>
-          <a:p>
-            <a:pPr algn="ctr"/>
-          </a:p>
-        </p:txBody>
-      </p:sp>
-      <p:cxnSp>
-        <p:nvCxnSpPr>
-          <p:cNvPr id="9" name="Connector 8"/>
-          <p:cNvCxnSpPr/>
-          <p:nvPr/>
-        </p:nvCxnSpPr>
-        <p:spPr>
-          <a:xfrm flipV="1">
-            <a:off x="2687760" y="334800"/>
-            <a:ext cx="162000" cy="194400"/>
-          </a:xfrm>
-          <a:prstGeom prst="line">
-            <a:avLst/>
-          </a:prstGeom>
-          <a:ln w="12960">
-            <a:solidFill>
-              <a:srgbClr val="AE4F67"/>
-            </a:solidFill>
-          </a:ln>
-        </p:spPr>
-      </p:cxnSp>
+              <a:t>의원 · 약국 이름</a:t>
+            </a:r>
+          </a:p>
+        </p:txBody>
+      </p:sp>
     </p:spTree>
   </p:cSld>
   <p:clrMapOvr>

--- a/public/fun/cards/care/care-13.pptx
+++ b/public/fun/cards/care/care-13.pptx
@@ -3099,56 +3099,45 @@
       <p:grpSpPr/>
       <p:sp>
         <p:nvSpPr>
-          <p:cNvPr id="2" name="텍스트"/>
-          <p:cNvSpPr txBox="1"/>
+          <p:cNvPr id="2" name="Rectangle 1"/>
+          <p:cNvSpPr/>
           <p:nvPr/>
         </p:nvSpPr>
         <p:spPr>
           <a:xfrm>
-            <a:off x="252000" y="223200"/>
-            <a:ext cx="2016000" cy="133351"/>
+            <a:off x="93600" y="93600"/>
+            <a:ext cx="3052800" cy="1612800"/>
           </a:xfrm>
           <a:prstGeom prst="rect">
             <a:avLst/>
           </a:prstGeom>
           <a:noFill/>
-        </p:spPr>
-        <p:txBody>
-          <a:bodyPr wrap="square" lIns="0" rIns="0" tIns="0" bIns="0" anchor="t">
-            <a:spAutoFit/>
-          </a:bodyPr>
-          <a:lstStyle/>
-          <a:p>
-            <a:pPr algn="l">
-              <a:lnSpc>
-                <a:spcPts val="1015"/>
-              </a:lnSpc>
-            </a:pPr>
-            <a:r>
-              <a:rPr sz="700" b="1" spc="200">
-                <a:solidFill>
-                  <a:srgbClr val="1D4872"/>
-                </a:solidFill>
-                <a:latin typeface="맑은 고딕"/>
-                <a:ea typeface="맑은 고딕"/>
-              </a:rPr>
-              <a:t>의원 · 약국 이름</a:t>
-            </a:r>
-          </a:p>
-        </p:txBody>
-      </p:sp>
-      <p:sp>
-        <p:nvSpPr>
-          <p:cNvPr id="3" name="Oval 2"/>
+          <a:ln w="3600">
+            <a:solidFill>
+              <a:srgbClr val="C4E3FF"/>
+            </a:solidFill>
+          </a:ln>
+        </p:spPr>
+        <p:txBody>
+          <a:bodyPr rtlCol="0" anchor="ctr"/>
+          <a:lstStyle/>
+          <a:p>
+            <a:pPr algn="ctr"/>
+          </a:p>
+        </p:txBody>
+      </p:sp>
+      <p:sp>
+        <p:nvSpPr>
+          <p:cNvPr id="3" name="Rectangle 2"/>
           <p:cNvSpPr/>
           <p:nvPr/>
         </p:nvSpPr>
         <p:spPr>
           <a:xfrm>
-            <a:off x="2955600" y="241200"/>
-            <a:ext cx="64800" cy="64800"/>
-          </a:xfrm>
-          <a:prstGeom prst="ellipse">
+            <a:off x="252000" y="252000"/>
+            <a:ext cx="79200" cy="79200"/>
+          </a:xfrm>
+          <a:prstGeom prst="rect">
             <a:avLst/>
           </a:prstGeom>
           <a:solidFill>
@@ -3174,8 +3163,8 @@
         </p:nvSpPr>
         <p:spPr>
           <a:xfrm>
-            <a:off x="252000" y="676800"/>
-            <a:ext cx="2520000" cy="360000"/>
+            <a:off x="396000" y="259200"/>
+            <a:ext cx="1512000" cy="123826"/>
           </a:xfrm>
           <a:prstGeom prst="rect">
             <a:avLst/>
@@ -3190,11 +3179,72 @@
           <a:p>
             <a:pPr algn="l">
               <a:lnSpc>
-                <a:spcPts val="3190"/>
+                <a:spcPts val="942"/>
               </a:lnSpc>
             </a:pPr>
             <a:r>
-              <a:rPr sz="2200" b="1">
+              <a:rPr sz="650" b="1" spc="220">
+                <a:solidFill>
+                  <a:srgbClr val="1D4872"/>
+                </a:solidFill>
+                <a:latin typeface="맑은 고딕"/>
+                <a:ea typeface="맑은 고딕"/>
+              </a:rPr>
+              <a:t>의원 · 약국 이름</a:t>
+            </a:r>
+          </a:p>
+        </p:txBody>
+      </p:sp>
+      <p:cxnSp>
+        <p:nvCxnSpPr>
+          <p:cNvPr id="5" name="Connector 4"/>
+          <p:cNvCxnSpPr/>
+          <p:nvPr/>
+        </p:nvCxnSpPr>
+        <p:spPr>
+          <a:xfrm>
+            <a:off x="252000" y="446400"/>
+            <a:ext cx="2736000" cy="0"/>
+          </a:xfrm>
+          <a:prstGeom prst="line">
+            <a:avLst/>
+          </a:prstGeom>
+          <a:ln w="3600">
+            <a:solidFill>
+              <a:srgbClr val="C4E3FF"/>
+            </a:solidFill>
+          </a:ln>
+        </p:spPr>
+      </p:cxnSp>
+      <p:sp>
+        <p:nvSpPr>
+          <p:cNvPr id="6" name="텍스트"/>
+          <p:cNvSpPr txBox="1"/>
+          <p:nvPr/>
+        </p:nvSpPr>
+        <p:spPr>
+          <a:xfrm>
+            <a:off x="252000" y="964800"/>
+            <a:ext cx="1800000" cy="237600"/>
+          </a:xfrm>
+          <a:prstGeom prst="rect">
+            <a:avLst/>
+          </a:prstGeom>
+          <a:noFill/>
+        </p:spPr>
+        <p:txBody>
+          <a:bodyPr wrap="square" lIns="0" rIns="0" tIns="0" bIns="0" anchor="t">
+            <a:spAutoFit/>
+          </a:bodyPr>
+          <a:lstStyle/>
+          <a:p>
+            <a:pPr algn="l">
+              <a:lnSpc>
+                <a:spcPts val="1957"/>
+              </a:lnSpc>
+            </a:pPr>
+            <a:r>
+              <a:rPr sz="1350" b="1" spc="120">
                 <a:solidFill>
                   <a:srgbClr val="12151C"/>
                 </a:solidFill>
@@ -3208,14 +3258,14 @@
       </p:sp>
       <p:sp>
         <p:nvSpPr>
-          <p:cNvPr id="5" name="텍스트"/>
+          <p:cNvPr id="7" name="텍스트"/>
           <p:cNvSpPr txBox="1"/>
           <p:nvPr/>
         </p:nvSpPr>
         <p:spPr>
           <a:xfrm>
-            <a:off x="252000" y="1080000"/>
-            <a:ext cx="2520000" cy="171451"/>
+            <a:off x="252000" y="1216800"/>
+            <a:ext cx="1800000" cy="133351"/>
           </a:xfrm>
           <a:prstGeom prst="rect">
             <a:avLst/>
@@ -3230,11 +3280,11 @@
           <a:p>
             <a:pPr algn="l">
               <a:lnSpc>
-                <a:spcPts val="1305"/>
+                <a:spcPts val="1015"/>
               </a:lnSpc>
             </a:pPr>
             <a:r>
-              <a:rPr sz="900" b="0">
+              <a:rPr sz="700" b="0" spc="60">
                 <a:solidFill>
                   <a:srgbClr val="1D4872"/>
                 </a:solidFill>
@@ -3248,19 +3298,19 @@
       </p:sp>
       <p:cxnSp>
         <p:nvCxnSpPr>
-          <p:cNvPr id="6" name="Connector 5"/>
+          <p:cNvPr id="8" name="Connector 7"/>
           <p:cNvCxnSpPr/>
           <p:nvPr/>
         </p:nvCxnSpPr>
         <p:spPr>
           <a:xfrm>
-            <a:off x="252000" y="1339200"/>
-            <a:ext cx="2736000" cy="0"/>
+            <a:off x="1872000" y="943200"/>
+            <a:ext cx="0" cy="604800"/>
           </a:xfrm>
           <a:prstGeom prst="line">
             <a:avLst/>
           </a:prstGeom>
-          <a:ln w="5760">
+          <a:ln w="3600">
             <a:solidFill>
               <a:srgbClr val="C4E3FF"/>
             </a:solidFill>
@@ -3269,14 +3319,14 @@
       </p:cxnSp>
       <p:sp>
         <p:nvSpPr>
-          <p:cNvPr id="7" name="텍스트"/>
+          <p:cNvPr id="9" name="텍스트"/>
           <p:cNvSpPr txBox="1"/>
           <p:nvPr/>
         </p:nvSpPr>
         <p:spPr>
           <a:xfrm>
-            <a:off x="252000" y="1411200"/>
-            <a:ext cx="792000" cy="129541"/>
+            <a:off x="2016000" y="1033200"/>
+            <a:ext cx="302400" cy="91441"/>
           </a:xfrm>
           <a:prstGeom prst="rect">
             <a:avLst/>
@@ -3291,11 +3341,51 @@
           <a:p>
             <a:pPr algn="l">
               <a:lnSpc>
-                <a:spcPts val="986"/>
+                <a:spcPts val="696"/>
               </a:lnSpc>
             </a:pPr>
             <a:r>
-              <a:rPr sz="680" b="0">
+              <a:rPr sz="480" b="1" spc="140">
+                <a:solidFill>
+                  <a:srgbClr val="1D4872"/>
+                </a:solidFill>
+                <a:latin typeface="맑은 고딕"/>
+                <a:ea typeface="맑은 고딕"/>
+              </a:rPr>
+              <a:t>TEL</a:t>
+            </a:r>
+          </a:p>
+        </p:txBody>
+      </p:sp>
+      <p:sp>
+        <p:nvSpPr>
+          <p:cNvPr id="10" name="텍스트"/>
+          <p:cNvSpPr txBox="1"/>
+          <p:nvPr/>
+        </p:nvSpPr>
+        <p:spPr>
+          <a:xfrm>
+            <a:off x="2318400" y="1022400"/>
+            <a:ext cx="972000" cy="123826"/>
+          </a:xfrm>
+          <a:prstGeom prst="rect">
+            <a:avLst/>
+          </a:prstGeom>
+          <a:noFill/>
+        </p:spPr>
+        <p:txBody>
+          <a:bodyPr wrap="square" lIns="0" rIns="0" tIns="0" bIns="0" anchor="t">
+            <a:spAutoFit/>
+          </a:bodyPr>
+          <a:lstStyle/>
+          <a:p>
+            <a:pPr algn="l">
+              <a:lnSpc>
+                <a:spcPts val="942"/>
+              </a:lnSpc>
+            </a:pPr>
+            <a:r>
+              <a:rPr sz="650" b="0">
                 <a:solidFill>
                   <a:srgbClr val="12151C"/>
                 </a:solidFill>
@@ -3309,14 +3399,14 @@
       </p:sp>
       <p:sp>
         <p:nvSpPr>
-          <p:cNvPr id="8" name="텍스트"/>
+          <p:cNvPr id="11" name="텍스트"/>
           <p:cNvSpPr txBox="1"/>
           <p:nvPr/>
         </p:nvSpPr>
         <p:spPr>
           <a:xfrm>
-            <a:off x="1080000" y="1411200"/>
-            <a:ext cx="900000" cy="129541"/>
+            <a:off x="2016000" y="1177200"/>
+            <a:ext cx="302400" cy="91441"/>
           </a:xfrm>
           <a:prstGeom prst="rect">
             <a:avLst/>
@@ -3331,11 +3421,51 @@
           <a:p>
             <a:pPr algn="l">
               <a:lnSpc>
-                <a:spcPts val="986"/>
+                <a:spcPts val="696"/>
               </a:lnSpc>
             </a:pPr>
             <a:r>
-              <a:rPr sz="680" b="0">
+              <a:rPr sz="480" b="1" spc="140">
+                <a:solidFill>
+                  <a:srgbClr val="1D4872"/>
+                </a:solidFill>
+                <a:latin typeface="맑은 고딕"/>
+                <a:ea typeface="맑은 고딕"/>
+              </a:rPr>
+              <a:t>MAIL</a:t>
+            </a:r>
+          </a:p>
+        </p:txBody>
+      </p:sp>
+      <p:sp>
+        <p:nvSpPr>
+          <p:cNvPr id="12" name="텍스트"/>
+          <p:cNvSpPr txBox="1"/>
+          <p:nvPr/>
+        </p:nvSpPr>
+        <p:spPr>
+          <a:xfrm>
+            <a:off x="2318400" y="1166400"/>
+            <a:ext cx="972000" cy="123826"/>
+          </a:xfrm>
+          <a:prstGeom prst="rect">
+            <a:avLst/>
+          </a:prstGeom>
+          <a:noFill/>
+        </p:spPr>
+        <p:txBody>
+          <a:bodyPr wrap="square" lIns="0" rIns="0" tIns="0" bIns="0" anchor="t">
+            <a:spAutoFit/>
+          </a:bodyPr>
+          <a:lstStyle/>
+          <a:p>
+            <a:pPr algn="l">
+              <a:lnSpc>
+                <a:spcPts val="942"/>
+              </a:lnSpc>
+            </a:pPr>
+            <a:r>
+              <a:rPr sz="650" b="0">
                 <a:solidFill>
                   <a:srgbClr val="12151C"/>
                 </a:solidFill>
@@ -3349,14 +3479,14 @@
       </p:sp>
       <p:sp>
         <p:nvSpPr>
-          <p:cNvPr id="9" name="텍스트"/>
+          <p:cNvPr id="13" name="텍스트"/>
           <p:cNvSpPr txBox="1"/>
           <p:nvPr/>
         </p:nvSpPr>
         <p:spPr>
           <a:xfrm>
-            <a:off x="2052000" y="1411200"/>
-            <a:ext cx="972000" cy="129541"/>
+            <a:off x="2016000" y="1321200"/>
+            <a:ext cx="302400" cy="91441"/>
           </a:xfrm>
           <a:prstGeom prst="rect">
             <a:avLst/>
@@ -3371,11 +3501,51 @@
           <a:p>
             <a:pPr algn="l">
               <a:lnSpc>
-                <a:spcPts val="986"/>
+                <a:spcPts val="696"/>
               </a:lnSpc>
             </a:pPr>
             <a:r>
-              <a:rPr sz="680" b="0">
+              <a:rPr sz="480" b="1" spc="140">
+                <a:solidFill>
+                  <a:srgbClr val="1D4872"/>
+                </a:solidFill>
+                <a:latin typeface="맑은 고딕"/>
+                <a:ea typeface="맑은 고딕"/>
+              </a:rPr>
+              <a:t>ADDR</a:t>
+            </a:r>
+          </a:p>
+        </p:txBody>
+      </p:sp>
+      <p:sp>
+        <p:nvSpPr>
+          <p:cNvPr id="14" name="텍스트"/>
+          <p:cNvSpPr txBox="1"/>
+          <p:nvPr/>
+        </p:nvSpPr>
+        <p:spPr>
+          <a:xfrm>
+            <a:off x="2318400" y="1310400"/>
+            <a:ext cx="972000" cy="123826"/>
+          </a:xfrm>
+          <a:prstGeom prst="rect">
+            <a:avLst/>
+          </a:prstGeom>
+          <a:noFill/>
+        </p:spPr>
+        <p:txBody>
+          <a:bodyPr wrap="square" lIns="0" rIns="0" tIns="0" bIns="0" anchor="t">
+            <a:spAutoFit/>
+          </a:bodyPr>
+          <a:lstStyle/>
+          <a:p>
+            <a:pPr algn="l">
+              <a:lnSpc>
+                <a:spcPts val="942"/>
+              </a:lnSpc>
+            </a:pPr>
+            <a:r>
+              <a:rPr sz="650" b="0">
                 <a:solidFill>
                   <a:srgbClr val="12151C"/>
                 </a:solidFill>
@@ -3383,126 +3553,6 @@
                 <a:ea typeface="맑은 고딕"/>
               </a:rPr>
               <a:t>주소를 입력해 주세요</a:t>
-            </a:r>
-          </a:p>
-        </p:txBody>
-      </p:sp>
-      <p:sp>
-        <p:nvSpPr>
-          <p:cNvPr id="10" name="텍스트"/>
-          <p:cNvSpPr txBox="1"/>
-          <p:nvPr/>
-        </p:nvSpPr>
-        <p:spPr>
-          <a:xfrm>
-            <a:off x="252000" y="1526400"/>
-            <a:ext cx="216000" cy="95251"/>
-          </a:xfrm>
-          <a:prstGeom prst="rect">
-            <a:avLst/>
-          </a:prstGeom>
-          <a:noFill/>
-        </p:spPr>
-        <p:txBody>
-          <a:bodyPr wrap="square" lIns="0" rIns="0" tIns="0" bIns="0" anchor="t">
-            <a:spAutoFit/>
-          </a:bodyPr>
-          <a:lstStyle/>
-          <a:p>
-            <a:pPr algn="l">
-              <a:lnSpc>
-                <a:spcPts val="725"/>
-              </a:lnSpc>
-            </a:pPr>
-            <a:r>
-              <a:rPr sz="500" b="1" spc="120">
-                <a:solidFill>
-                  <a:srgbClr val="1D4872"/>
-                </a:solidFill>
-                <a:latin typeface="맑은 고딕"/>
-                <a:ea typeface="맑은 고딕"/>
-              </a:rPr>
-              <a:t>TEL</a:t>
-            </a:r>
-          </a:p>
-        </p:txBody>
-      </p:sp>
-      <p:sp>
-        <p:nvSpPr>
-          <p:cNvPr id="11" name="텍스트"/>
-          <p:cNvSpPr txBox="1"/>
-          <p:nvPr/>
-        </p:nvSpPr>
-        <p:spPr>
-          <a:xfrm>
-            <a:off x="1080000" y="1526400"/>
-            <a:ext cx="216000" cy="95251"/>
-          </a:xfrm>
-          <a:prstGeom prst="rect">
-            <a:avLst/>
-          </a:prstGeom>
-          <a:noFill/>
-        </p:spPr>
-        <p:txBody>
-          <a:bodyPr wrap="square" lIns="0" rIns="0" tIns="0" bIns="0" anchor="t">
-            <a:spAutoFit/>
-          </a:bodyPr>
-          <a:lstStyle/>
-          <a:p>
-            <a:pPr algn="l">
-              <a:lnSpc>
-                <a:spcPts val="725"/>
-              </a:lnSpc>
-            </a:pPr>
-            <a:r>
-              <a:rPr sz="500" b="1" spc="120">
-                <a:solidFill>
-                  <a:srgbClr val="1D4872"/>
-                </a:solidFill>
-                <a:latin typeface="맑은 고딕"/>
-                <a:ea typeface="맑은 고딕"/>
-              </a:rPr>
-              <a:t>MAIL</a:t>
-            </a:r>
-          </a:p>
-        </p:txBody>
-      </p:sp>
-      <p:sp>
-        <p:nvSpPr>
-          <p:cNvPr id="12" name="텍스트"/>
-          <p:cNvSpPr txBox="1"/>
-          <p:nvPr/>
-        </p:nvSpPr>
-        <p:spPr>
-          <a:xfrm>
-            <a:off x="2052000" y="1526400"/>
-            <a:ext cx="216000" cy="95251"/>
-          </a:xfrm>
-          <a:prstGeom prst="rect">
-            <a:avLst/>
-          </a:prstGeom>
-          <a:noFill/>
-        </p:spPr>
-        <p:txBody>
-          <a:bodyPr wrap="square" lIns="0" rIns="0" tIns="0" bIns="0" anchor="t">
-            <a:spAutoFit/>
-          </a:bodyPr>
-          <a:lstStyle/>
-          <a:p>
-            <a:pPr algn="l">
-              <a:lnSpc>
-                <a:spcPts val="725"/>
-              </a:lnSpc>
-            </a:pPr>
-            <a:r>
-              <a:rPr sz="500" b="1" spc="120">
-                <a:solidFill>
-                  <a:srgbClr val="1D4872"/>
-                </a:solidFill>
-                <a:latin typeface="맑은 고딕"/>
-                <a:ea typeface="맑은 고딕"/>
-              </a:rPr>
-              <a:t>ADDR</a:t>
             </a:r>
           </a:p>
         </p:txBody>
@@ -3535,19 +3585,79 @@
       <p:grpSpPr/>
       <p:sp>
         <p:nvSpPr>
-          <p:cNvPr id="2" name="텍스트"/>
-          <p:cNvSpPr txBox="1"/>
+          <p:cNvPr id="2" name="Rectangle 1"/>
+          <p:cNvSpPr/>
           <p:nvPr/>
         </p:nvSpPr>
         <p:spPr>
           <a:xfrm>
-            <a:off x="216000" y="72000"/>
-            <a:ext cx="1080000" cy="936000"/>
+            <a:off x="0" y="0"/>
+            <a:ext cx="3240000" cy="1800000"/>
+          </a:xfrm>
+          <a:prstGeom prst="rect">
+            <a:avLst/>
+          </a:prstGeom>
+          <a:solidFill>
+            <a:srgbClr val="58AFFF"/>
+          </a:solidFill>
+          <a:ln>
+            <a:noFill/>
+          </a:ln>
+        </p:spPr>
+        <p:txBody>
+          <a:bodyPr rtlCol="0" anchor="ctr"/>
+          <a:lstStyle/>
+          <a:p>
+            <a:pPr algn="ctr"/>
+          </a:p>
+        </p:txBody>
+      </p:sp>
+      <p:sp>
+        <p:nvSpPr>
+          <p:cNvPr id="3" name="Rectangle 2"/>
+          <p:cNvSpPr/>
+          <p:nvPr/>
+        </p:nvSpPr>
+        <p:spPr>
+          <a:xfrm>
+            <a:off x="108000" y="108000"/>
+            <a:ext cx="3024000" cy="1584000"/>
           </a:xfrm>
           <a:prstGeom prst="rect">
             <a:avLst/>
           </a:prstGeom>
           <a:noFill/>
+          <a:ln w="3600">
+            <a:solidFill>
+              <a:srgbClr val="12151C">
+                <a:alpha val="50000"/>
+              </a:srgbClr>
+            </a:solidFill>
+          </a:ln>
+        </p:spPr>
+        <p:txBody>
+          <a:bodyPr rtlCol="0" anchor="ctr"/>
+          <a:lstStyle/>
+          <a:p>
+            <a:pPr algn="ctr"/>
+          </a:p>
+        </p:txBody>
+      </p:sp>
+      <p:sp>
+        <p:nvSpPr>
+          <p:cNvPr id="4" name="텍스트"/>
+          <p:cNvSpPr txBox="1"/>
+          <p:nvPr/>
+        </p:nvSpPr>
+        <p:spPr>
+          <a:xfrm>
+            <a:off x="288000" y="280800"/>
+            <a:ext cx="1440000" cy="99061"/>
+          </a:xfrm>
+          <a:prstGeom prst="rect">
+            <a:avLst/>
+          </a:prstGeom>
+          <a:noFill/>
         </p:spPr>
         <p:txBody>
           <a:bodyPr wrap="square" lIns="0" rIns="0" tIns="0" bIns="0" anchor="t">
@@ -3557,32 +3667,32 @@
           <a:p>
             <a:pPr algn="l">
               <a:lnSpc>
-                <a:spcPts val="15950"/>
+                <a:spcPts val="754"/>
               </a:lnSpc>
             </a:pPr>
             <a:r>
-              <a:rPr sz="11000" b="1">
+              <a:rPr sz="520" b="1" spc="240">
                 <a:solidFill>
                   <a:srgbClr val="12151C"/>
                 </a:solidFill>
                 <a:latin typeface="맑은 고딕"/>
                 <a:ea typeface="맑은 고딕"/>
               </a:rPr>
-              <a:t>“</a:t>
-            </a:r>
-          </a:p>
-        </p:txBody>
-      </p:sp>
-      <p:sp>
-        <p:nvSpPr>
-          <p:cNvPr id="3" name="텍스트"/>
+              <a:t>진료 · 상담</a:t>
+            </a:r>
+          </a:p>
+        </p:txBody>
+      </p:sp>
+      <p:sp>
+        <p:nvSpPr>
+          <p:cNvPr id="5" name="텍스트"/>
           <p:cNvSpPr txBox="1"/>
           <p:nvPr/>
         </p:nvSpPr>
         <p:spPr>
           <a:xfrm>
-            <a:off x="252000" y="792000"/>
-            <a:ext cx="2520000" cy="648000"/>
+            <a:off x="288000" y="468000"/>
+            <a:ext cx="1872000" cy="216000"/>
           </a:xfrm>
           <a:prstGeom prst="rect">
             <a:avLst/>
@@ -3597,53 +3707,53 @@
           <a:p>
             <a:pPr algn="l">
               <a:lnSpc>
-                <a:spcPts val="1812"/>
+                <a:spcPts val="1377"/>
               </a:lnSpc>
             </a:pPr>
             <a:r>
-              <a:rPr sz="1250" b="1">
+              <a:rPr sz="950" b="1">
                 <a:solidFill>
                   <a:srgbClr val="12151C"/>
                 </a:solidFill>
                 <a:latin typeface="맑은 고딕"/>
                 <a:ea typeface="맑은 고딕"/>
               </a:rPr>
-              <a:t>친절한 설명이 첫 번째 치료입니다</a:t>
+              <a:t>건강 검진</a:t>
             </a:r>
           </a:p>
         </p:txBody>
       </p:sp>
       <p:cxnSp>
         <p:nvCxnSpPr>
-          <p:cNvPr id="4" name="Connector 3"/>
+          <p:cNvPr id="6" name="Connector 5"/>
           <p:cNvCxnSpPr/>
           <p:nvPr/>
         </p:nvCxnSpPr>
         <p:spPr>
           <a:xfrm>
-            <a:off x="252000" y="1512000"/>
-            <a:ext cx="2736000" cy="0"/>
+            <a:off x="288000" y="669600"/>
+            <a:ext cx="1728000" cy="0"/>
           </a:xfrm>
           <a:prstGeom prst="line">
             <a:avLst/>
           </a:prstGeom>
-          <a:ln w="5760">
+          <a:ln w="3600">
             <a:solidFill>
-              <a:srgbClr val="2365A4"/>
+              <a:srgbClr val="12151C"/>
             </a:solidFill>
           </a:ln>
         </p:spPr>
       </p:cxnSp>
       <p:sp>
         <p:nvSpPr>
-          <p:cNvPr id="5" name="텍스트"/>
+          <p:cNvPr id="7" name="텍스트"/>
           <p:cNvSpPr txBox="1"/>
           <p:nvPr/>
         </p:nvSpPr>
         <p:spPr>
           <a:xfrm>
-            <a:off x="252000" y="1569600"/>
-            <a:ext cx="2736000" cy="123826"/>
+            <a:off x="288000" y="691200"/>
+            <a:ext cx="1872000" cy="216000"/>
           </a:xfrm>
           <a:prstGeom prst="rect">
             <a:avLst/>
@@ -3656,15 +3766,362 @@
           </a:bodyPr>
           <a:lstStyle/>
           <a:p>
-            <a:pPr algn="r">
+            <a:pPr algn="l">
+              <a:lnSpc>
+                <a:spcPts val="1377"/>
+              </a:lnSpc>
+            </a:pPr>
+            <a:r>
+              <a:rPr sz="950" b="1">
+                <a:solidFill>
+                  <a:srgbClr val="12151C"/>
+                </a:solidFill>
+                <a:latin typeface="맑은 고딕"/>
+                <a:ea typeface="맑은 고딕"/>
+              </a:rPr>
+              <a:t>재활 치료</a:t>
+            </a:r>
+          </a:p>
+        </p:txBody>
+      </p:sp>
+      <p:cxnSp>
+        <p:nvCxnSpPr>
+          <p:cNvPr id="8" name="Connector 7"/>
+          <p:cNvCxnSpPr/>
+          <p:nvPr/>
+        </p:nvCxnSpPr>
+        <p:spPr>
+          <a:xfrm>
+            <a:off x="288000" y="892800"/>
+            <a:ext cx="1728000" cy="0"/>
+          </a:xfrm>
+          <a:prstGeom prst="line">
+            <a:avLst/>
+          </a:prstGeom>
+          <a:ln w="3600">
+            <a:solidFill>
+              <a:srgbClr val="12151C"/>
+            </a:solidFill>
+          </a:ln>
+        </p:spPr>
+      </p:cxnSp>
+      <p:sp>
+        <p:nvSpPr>
+          <p:cNvPr id="9" name="텍스트"/>
+          <p:cNvSpPr txBox="1"/>
+          <p:nvPr/>
+        </p:nvSpPr>
+        <p:spPr>
+          <a:xfrm>
+            <a:off x="288000" y="914400"/>
+            <a:ext cx="1872000" cy="216000"/>
+          </a:xfrm>
+          <a:prstGeom prst="rect">
+            <a:avLst/>
+          </a:prstGeom>
+          <a:noFill/>
+        </p:spPr>
+        <p:txBody>
+          <a:bodyPr wrap="square" lIns="0" rIns="0" tIns="0" bIns="0" anchor="t">
+            <a:spAutoFit/>
+          </a:bodyPr>
+          <a:lstStyle/>
+          <a:p>
+            <a:pPr algn="l">
+              <a:lnSpc>
+                <a:spcPts val="1377"/>
+              </a:lnSpc>
+            </a:pPr>
+            <a:r>
+              <a:rPr sz="950" b="1">
+                <a:solidFill>
+                  <a:srgbClr val="12151C"/>
+                </a:solidFill>
+                <a:latin typeface="맑은 고딕"/>
+                <a:ea typeface="맑은 고딕"/>
+              </a:rPr>
+              <a:t>물리 치료</a:t>
+            </a:r>
+          </a:p>
+        </p:txBody>
+      </p:sp>
+      <p:cxnSp>
+        <p:nvCxnSpPr>
+          <p:cNvPr id="10" name="Connector 9"/>
+          <p:cNvCxnSpPr/>
+          <p:nvPr/>
+        </p:nvCxnSpPr>
+        <p:spPr>
+          <a:xfrm>
+            <a:off x="288000" y="1116000"/>
+            <a:ext cx="1728000" cy="0"/>
+          </a:xfrm>
+          <a:prstGeom prst="line">
+            <a:avLst/>
+          </a:prstGeom>
+          <a:ln w="3600">
+            <a:solidFill>
+              <a:srgbClr val="12151C"/>
+            </a:solidFill>
+          </a:ln>
+        </p:spPr>
+      </p:cxnSp>
+      <p:sp>
+        <p:nvSpPr>
+          <p:cNvPr id="11" name="텍스트"/>
+          <p:cNvSpPr txBox="1"/>
+          <p:nvPr/>
+        </p:nvSpPr>
+        <p:spPr>
+          <a:xfrm>
+            <a:off x="288000" y="1137600"/>
+            <a:ext cx="1872000" cy="216000"/>
+          </a:xfrm>
+          <a:prstGeom prst="rect">
+            <a:avLst/>
+          </a:prstGeom>
+          <a:noFill/>
+        </p:spPr>
+        <p:txBody>
+          <a:bodyPr wrap="square" lIns="0" rIns="0" tIns="0" bIns="0" anchor="t">
+            <a:spAutoFit/>
+          </a:bodyPr>
+          <a:lstStyle/>
+          <a:p>
+            <a:pPr algn="l">
+              <a:lnSpc>
+                <a:spcPts val="1377"/>
+              </a:lnSpc>
+            </a:pPr>
+            <a:r>
+              <a:rPr sz="950" b="1">
+                <a:solidFill>
+                  <a:srgbClr val="12151C"/>
+                </a:solidFill>
+                <a:latin typeface="맑은 고딕"/>
+                <a:ea typeface="맑은 고딕"/>
+              </a:rPr>
+              <a:t>영양 상담</a:t>
+            </a:r>
+          </a:p>
+        </p:txBody>
+      </p:sp>
+      <p:cxnSp>
+        <p:nvCxnSpPr>
+          <p:cNvPr id="12" name="Connector 11"/>
+          <p:cNvCxnSpPr/>
+          <p:nvPr/>
+        </p:nvCxnSpPr>
+        <p:spPr>
+          <a:xfrm>
+            <a:off x="288000" y="1339200"/>
+            <a:ext cx="1728000" cy="0"/>
+          </a:xfrm>
+          <a:prstGeom prst="line">
+            <a:avLst/>
+          </a:prstGeom>
+          <a:ln w="3600">
+            <a:solidFill>
+              <a:srgbClr val="12151C"/>
+            </a:solidFill>
+          </a:ln>
+        </p:spPr>
+      </p:cxnSp>
+      <p:sp>
+        <p:nvSpPr>
+          <p:cNvPr id="13" name="텍스트"/>
+          <p:cNvSpPr txBox="1"/>
+          <p:nvPr/>
+        </p:nvSpPr>
+        <p:spPr>
+          <a:xfrm>
+            <a:off x="2268000" y="468000"/>
+            <a:ext cx="864000" cy="91441"/>
+          </a:xfrm>
+          <a:prstGeom prst="rect">
+            <a:avLst/>
+          </a:prstGeom>
+          <a:noFill/>
+        </p:spPr>
+        <p:txBody>
+          <a:bodyPr wrap="square" lIns="0" rIns="0" tIns="0" bIns="0" anchor="t">
+            <a:spAutoFit/>
+          </a:bodyPr>
+          <a:lstStyle/>
+          <a:p>
+            <a:pPr algn="l">
+              <a:lnSpc>
+                <a:spcPts val="696"/>
+              </a:lnSpc>
+            </a:pPr>
+            <a:r>
+              <a:rPr sz="480" b="1" spc="140">
+                <a:solidFill>
+                  <a:srgbClr val="12151C">
+                    <a:alpha val="75000"/>
+                  </a:srgbClr>
+                </a:solidFill>
+                <a:latin typeface="맑은 고딕"/>
+                <a:ea typeface="맑은 고딕"/>
+              </a:rPr>
+              <a:t>HOURS</a:t>
+            </a:r>
+          </a:p>
+        </p:txBody>
+      </p:sp>
+      <p:sp>
+        <p:nvSpPr>
+          <p:cNvPr id="14" name="텍스트"/>
+          <p:cNvSpPr txBox="1"/>
+          <p:nvPr/>
+        </p:nvSpPr>
+        <p:spPr>
+          <a:xfrm>
+            <a:off x="2268000" y="576000"/>
+            <a:ext cx="864000" cy="118111"/>
+          </a:xfrm>
+          <a:prstGeom prst="rect">
+            <a:avLst/>
+          </a:prstGeom>
+          <a:noFill/>
+        </p:spPr>
+        <p:txBody>
+          <a:bodyPr wrap="square" lIns="0" rIns="0" tIns="0" bIns="0" anchor="t">
+            <a:spAutoFit/>
+          </a:bodyPr>
+          <a:lstStyle/>
+          <a:p>
+            <a:pPr algn="l">
+              <a:lnSpc>
+                <a:spcPts val="899"/>
+              </a:lnSpc>
+            </a:pPr>
+            <a:r>
+              <a:rPr sz="620" b="1">
+                <a:solidFill>
+                  <a:srgbClr val="12151C"/>
+                </a:solidFill>
+                <a:latin typeface="맑은 고딕"/>
+                <a:ea typeface="맑은 고딕"/>
+              </a:rPr>
+              <a:t>평일 09:00 – 18:00</a:t>
+            </a:r>
+          </a:p>
+        </p:txBody>
+      </p:sp>
+      <p:sp>
+        <p:nvSpPr>
+          <p:cNvPr id="15" name="텍스트"/>
+          <p:cNvSpPr txBox="1"/>
+          <p:nvPr/>
+        </p:nvSpPr>
+        <p:spPr>
+          <a:xfrm>
+            <a:off x="2268000" y="900000"/>
+            <a:ext cx="864000" cy="91441"/>
+          </a:xfrm>
+          <a:prstGeom prst="rect">
+            <a:avLst/>
+          </a:prstGeom>
+          <a:noFill/>
+        </p:spPr>
+        <p:txBody>
+          <a:bodyPr wrap="square" lIns="0" rIns="0" tIns="0" bIns="0" anchor="t">
+            <a:spAutoFit/>
+          </a:bodyPr>
+          <a:lstStyle/>
+          <a:p>
+            <a:pPr algn="l">
+              <a:lnSpc>
+                <a:spcPts val="696"/>
+              </a:lnSpc>
+            </a:pPr>
+            <a:r>
+              <a:rPr sz="480" b="1" spc="140">
+                <a:solidFill>
+                  <a:srgbClr val="12151C">
+                    <a:alpha val="75000"/>
+                  </a:srgbClr>
+                </a:solidFill>
+                <a:latin typeface="맑은 고딕"/>
+                <a:ea typeface="맑은 고딕"/>
+              </a:rPr>
+              <a:t>WEB</a:t>
+            </a:r>
+          </a:p>
+        </p:txBody>
+      </p:sp>
+      <p:sp>
+        <p:nvSpPr>
+          <p:cNvPr id="16" name="텍스트"/>
+          <p:cNvSpPr txBox="1"/>
+          <p:nvPr/>
+        </p:nvSpPr>
+        <p:spPr>
+          <a:xfrm>
+            <a:off x="2268000" y="1008000"/>
+            <a:ext cx="864000" cy="118111"/>
+          </a:xfrm>
+          <a:prstGeom prst="rect">
+            <a:avLst/>
+          </a:prstGeom>
+          <a:noFill/>
+        </p:spPr>
+        <p:txBody>
+          <a:bodyPr wrap="square" lIns="0" rIns="0" tIns="0" bIns="0" anchor="t">
+            <a:spAutoFit/>
+          </a:bodyPr>
+          <a:lstStyle/>
+          <a:p>
+            <a:pPr algn="l">
+              <a:lnSpc>
+                <a:spcPts val="899"/>
+              </a:lnSpc>
+            </a:pPr>
+            <a:r>
+              <a:rPr sz="620" b="1">
+                <a:solidFill>
+                  <a:srgbClr val="12151C"/>
+                </a:solidFill>
+                <a:latin typeface="맑은 고딕"/>
+                <a:ea typeface="맑은 고딕"/>
+              </a:rPr>
+              <a:t>www.example.com</a:t>
+            </a:r>
+          </a:p>
+        </p:txBody>
+      </p:sp>
+      <p:sp>
+        <p:nvSpPr>
+          <p:cNvPr id="17" name="텍스트"/>
+          <p:cNvSpPr txBox="1"/>
+          <p:nvPr/>
+        </p:nvSpPr>
+        <p:spPr>
+          <a:xfrm>
+            <a:off x="288000" y="1512000"/>
+            <a:ext cx="1800000" cy="123826"/>
+          </a:xfrm>
+          <a:prstGeom prst="rect">
+            <a:avLst/>
+          </a:prstGeom>
+          <a:noFill/>
+        </p:spPr>
+        <p:txBody>
+          <a:bodyPr wrap="square" lIns="0" rIns="0" tIns="0" bIns="0" anchor="t">
+            <a:spAutoFit/>
+          </a:bodyPr>
+          <a:lstStyle/>
+          <a:p>
+            <a:pPr algn="l">
               <a:lnSpc>
                 <a:spcPts val="942"/>
               </a:lnSpc>
             </a:pPr>
             <a:r>
-              <a:rPr sz="650" b="1" spc="200">
+              <a:rPr sz="650" b="1" spc="220">
                 <a:solidFill>
-                  <a:srgbClr val="18324E"/>
+                  <a:srgbClr val="12151C"/>
                 </a:solidFill>
                 <a:latin typeface="맑은 고딕"/>
                 <a:ea typeface="맑은 고딕"/>
